--- a/koreatech-db/theory/이론4장_SQL의_이론적_기초.pptx
+++ b/koreatech-db/theory/이론4장_SQL의_이론적_기초.pptx
@@ -12150,9 +12150,9 @@
                 <a:solidFill>
                   <a:srgbClr val="7A869C"/>
                 </a:solidFill>
-                <a:latin typeface="나눔고딕코딩"/>
-                <a:ea typeface="나눔고딕코딩"/>
-                <a:cs typeface="나눔고딕코딩"/>
+                <a:latin typeface="D2Coding"/>
+                <a:ea typeface="D2Coding"/>
+                <a:cs typeface="D2Coding"/>
               </a:rPr>
               <a:t>1</a:t>
             </a:r>
@@ -12168,9 +12168,9 @@
                 <a:solidFill>
                   <a:srgbClr val="7A869C"/>
                 </a:solidFill>
-                <a:latin typeface="나눔고딕코딩"/>
-                <a:ea typeface="나눔고딕코딩"/>
-                <a:cs typeface="나눔고딕코딩"/>
+                <a:latin typeface="D2Coding"/>
+                <a:ea typeface="D2Coding"/>
+                <a:cs typeface="D2Coding"/>
               </a:rPr>
               <a:t>2</a:t>
             </a:r>
@@ -12186,9 +12186,9 @@
                 <a:solidFill>
                   <a:srgbClr val="7A869C"/>
                 </a:solidFill>
-                <a:latin typeface="나눔고딕코딩"/>
-                <a:ea typeface="나눔고딕코딩"/>
-                <a:cs typeface="나눔고딕코딩"/>
+                <a:latin typeface="D2Coding"/>
+                <a:ea typeface="D2Coding"/>
+                <a:cs typeface="D2Coding"/>
               </a:rPr>
               <a:t>3</a:t>
             </a:r>
@@ -12204,9 +12204,9 @@
                 <a:solidFill>
                   <a:srgbClr val="7A869C"/>
                 </a:solidFill>
-                <a:latin typeface="나눔고딕코딩"/>
-                <a:ea typeface="나눔고딕코딩"/>
-                <a:cs typeface="나눔고딕코딩"/>
+                <a:latin typeface="D2Coding"/>
+                <a:ea typeface="D2Coding"/>
+                <a:cs typeface="D2Coding"/>
               </a:rPr>
               <a:t>4</a:t>
             </a:r>
@@ -12222,9 +12222,9 @@
                 <a:solidFill>
                   <a:srgbClr val="7A869C"/>
                 </a:solidFill>
-                <a:latin typeface="나눔고딕코딩"/>
-                <a:ea typeface="나눔고딕코딩"/>
-                <a:cs typeface="나눔고딕코딩"/>
+                <a:latin typeface="D2Coding"/>
+                <a:ea typeface="D2Coding"/>
+                <a:cs typeface="D2Coding"/>
               </a:rPr>
               <a:t>5</a:t>
             </a:r>
@@ -12240,9 +12240,9 @@
                 <a:solidFill>
                   <a:srgbClr val="7A869C"/>
                 </a:solidFill>
-                <a:latin typeface="나눔고딕코딩"/>
-                <a:ea typeface="나눔고딕코딩"/>
-                <a:cs typeface="나눔고딕코딩"/>
+                <a:latin typeface="D2Coding"/>
+                <a:ea typeface="D2Coding"/>
+                <a:cs typeface="D2Coding"/>
               </a:rPr>
               <a:t>6</a:t>
             </a:r>
@@ -12258,9 +12258,9 @@
                 <a:solidFill>
                   <a:srgbClr val="7A869C"/>
                 </a:solidFill>
-                <a:latin typeface="나눔고딕코딩"/>
-                <a:ea typeface="나눔고딕코딩"/>
-                <a:cs typeface="나눔고딕코딩"/>
+                <a:latin typeface="D2Coding"/>
+                <a:ea typeface="D2Coding"/>
+                <a:cs typeface="D2Coding"/>
               </a:rPr>
               <a:t>7</a:t>
             </a:r>
@@ -12276,9 +12276,9 @@
                 <a:solidFill>
                   <a:srgbClr val="7A869C"/>
                 </a:solidFill>
-                <a:latin typeface="나눔고딕코딩"/>
-                <a:ea typeface="나눔고딕코딩"/>
-                <a:cs typeface="나눔고딕코딩"/>
+                <a:latin typeface="D2Coding"/>
+                <a:ea typeface="D2Coding"/>
+                <a:cs typeface="D2Coding"/>
               </a:rPr>
               <a:t>8</a:t>
             </a:r>
@@ -12317,9 +12317,9 @@
                 <a:solidFill>
                   <a:srgbClr val="E6EAF2"/>
                 </a:solidFill>
-                <a:latin typeface="나눔고딕코딩"/>
-                <a:ea typeface="나눔고딕코딩"/>
-                <a:cs typeface="나눔고딕코딩"/>
+                <a:latin typeface="D2Coding"/>
+                <a:ea typeface="D2Coding"/>
+                <a:cs typeface="D2Coding"/>
               </a:rPr>
               <a:t>-- 잘못된 방법: 결과가 0건 (비교 결과가 전부 '모름')</a:t>
             </a:r>
@@ -12335,9 +12335,9 @@
                 <a:solidFill>
                   <a:srgbClr val="E6EAF2"/>
                 </a:solidFill>
-                <a:latin typeface="나눔고딕코딩"/>
-                <a:ea typeface="나눔고딕코딩"/>
-                <a:cs typeface="나눔고딕코딩"/>
+                <a:latin typeface="D2Coding"/>
+                <a:ea typeface="D2Coding"/>
+                <a:cs typeface="D2Coding"/>
               </a:rPr>
               <a:t>SELECT * FROM orders WHERE emp_id = NULL;</a:t>
             </a:r>
@@ -12353,9 +12353,9 @@
                 <a:solidFill>
                   <a:srgbClr val="E6EAF2"/>
                 </a:solidFill>
-                <a:latin typeface="나눔고딕코딩"/>
-                <a:ea typeface="나눔고딕코딩"/>
-                <a:cs typeface="나눔고딕코딩"/>
+                <a:latin typeface="D2Coding"/>
+                <a:ea typeface="D2Coding"/>
+                <a:cs typeface="D2Coding"/>
               </a:rPr>
               <a:t/>
             </a:r>
@@ -12371,9 +12371,9 @@
                 <a:solidFill>
                   <a:srgbClr val="E6EAF2"/>
                 </a:solidFill>
-                <a:latin typeface="나눔고딕코딩"/>
-                <a:ea typeface="나눔고딕코딩"/>
-                <a:cs typeface="나눔고딕코딩"/>
+                <a:latin typeface="D2Coding"/>
+                <a:ea typeface="D2Coding"/>
+                <a:cs typeface="D2Coding"/>
               </a:rPr>
               <a:t>-- 올바른 방법: 온라인 주문 7건이 조회된다</a:t>
             </a:r>
@@ -12389,9 +12389,9 @@
                 <a:solidFill>
                   <a:srgbClr val="E6EAF2"/>
                 </a:solidFill>
-                <a:latin typeface="나눔고딕코딩"/>
-                <a:ea typeface="나눔고딕코딩"/>
-                <a:cs typeface="나눔고딕코딩"/>
+                <a:latin typeface="D2Coding"/>
+                <a:ea typeface="D2Coding"/>
+                <a:cs typeface="D2Coding"/>
               </a:rPr>
               <a:t>SELECT * FROM orders WHERE emp_id IS NULL;</a:t>
             </a:r>
@@ -12407,9 +12407,9 @@
                 <a:solidFill>
                   <a:srgbClr val="E6EAF2"/>
                 </a:solidFill>
-                <a:latin typeface="나눔고딕코딩"/>
-                <a:ea typeface="나눔고딕코딩"/>
-                <a:cs typeface="나눔고딕코딩"/>
+                <a:latin typeface="D2Coding"/>
+                <a:ea typeface="D2Coding"/>
+                <a:cs typeface="D2Coding"/>
               </a:rPr>
               <a:t/>
             </a:r>
@@ -12425,9 +12425,9 @@
                 <a:solidFill>
                   <a:srgbClr val="E6EAF2"/>
                 </a:solidFill>
-                <a:latin typeface="나눔고딕코딩"/>
-                <a:ea typeface="나눔고딕코딩"/>
-                <a:cs typeface="나눔고딕코딩"/>
+                <a:latin typeface="D2Coding"/>
+                <a:ea typeface="D2Coding"/>
+                <a:cs typeface="D2Coding"/>
               </a:rPr>
               <a:t>-- 반대는 IS NOT NULL: 담당 직원이 있는 오프라인 주문</a:t>
             </a:r>
@@ -12443,9 +12443,9 @@
                 <a:solidFill>
                   <a:srgbClr val="E6EAF2"/>
                 </a:solidFill>
-                <a:latin typeface="나눔고딕코딩"/>
-                <a:ea typeface="나눔고딕코딩"/>
-                <a:cs typeface="나눔고딕코딩"/>
+                <a:latin typeface="D2Coding"/>
+                <a:ea typeface="D2Coding"/>
+                <a:cs typeface="D2Coding"/>
               </a:rPr>
               <a:t>SELECT * FROM orders WHERE emp_id IS NOT NULL;</a:t>
             </a:r>
@@ -14847,9 +14847,9 @@
                 <a:solidFill>
                   <a:srgbClr val="7A869C"/>
                 </a:solidFill>
-                <a:latin typeface="나눔고딕코딩"/>
-                <a:ea typeface="나눔고딕코딩"/>
-                <a:cs typeface="나눔고딕코딩"/>
+                <a:latin typeface="D2Coding"/>
+                <a:ea typeface="D2Coding"/>
+                <a:cs typeface="D2Coding"/>
               </a:rPr>
               <a:t>1</a:t>
             </a:r>
@@ -14865,9 +14865,9 @@
                 <a:solidFill>
                   <a:srgbClr val="7A869C"/>
                 </a:solidFill>
-                <a:latin typeface="나눔고딕코딩"/>
-                <a:ea typeface="나눔고딕코딩"/>
-                <a:cs typeface="나눔고딕코딩"/>
+                <a:latin typeface="D2Coding"/>
+                <a:ea typeface="D2Coding"/>
+                <a:cs typeface="D2Coding"/>
               </a:rPr>
               <a:t>2</a:t>
             </a:r>
@@ -14883,9 +14883,9 @@
                 <a:solidFill>
                   <a:srgbClr val="7A869C"/>
                 </a:solidFill>
-                <a:latin typeface="나눔고딕코딩"/>
-                <a:ea typeface="나눔고딕코딩"/>
-                <a:cs typeface="나눔고딕코딩"/>
+                <a:latin typeface="D2Coding"/>
+                <a:ea typeface="D2Coding"/>
+                <a:cs typeface="D2Coding"/>
               </a:rPr>
               <a:t>3</a:t>
             </a:r>
@@ -14901,9 +14901,9 @@
                 <a:solidFill>
                   <a:srgbClr val="7A869C"/>
                 </a:solidFill>
-                <a:latin typeface="나눔고딕코딩"/>
-                <a:ea typeface="나눔고딕코딩"/>
-                <a:cs typeface="나눔고딕코딩"/>
+                <a:latin typeface="D2Coding"/>
+                <a:ea typeface="D2Coding"/>
+                <a:cs typeface="D2Coding"/>
               </a:rPr>
               <a:t>4</a:t>
             </a:r>
@@ -14919,9 +14919,9 @@
                 <a:solidFill>
                   <a:srgbClr val="7A869C"/>
                 </a:solidFill>
-                <a:latin typeface="나눔고딕코딩"/>
-                <a:ea typeface="나눔고딕코딩"/>
-                <a:cs typeface="나눔고딕코딩"/>
+                <a:latin typeface="D2Coding"/>
+                <a:ea typeface="D2Coding"/>
+                <a:cs typeface="D2Coding"/>
               </a:rPr>
               <a:t>5</a:t>
             </a:r>
@@ -14937,9 +14937,9 @@
                 <a:solidFill>
                   <a:srgbClr val="7A869C"/>
                 </a:solidFill>
-                <a:latin typeface="나눔고딕코딩"/>
-                <a:ea typeface="나눔고딕코딩"/>
-                <a:cs typeface="나눔고딕코딩"/>
+                <a:latin typeface="D2Coding"/>
+                <a:ea typeface="D2Coding"/>
+                <a:cs typeface="D2Coding"/>
               </a:rPr>
               <a:t>6</a:t>
             </a:r>
@@ -14955,9 +14955,9 @@
                 <a:solidFill>
                   <a:srgbClr val="7A869C"/>
                 </a:solidFill>
-                <a:latin typeface="나눔고딕코딩"/>
-                <a:ea typeface="나눔고딕코딩"/>
-                <a:cs typeface="나눔고딕코딩"/>
+                <a:latin typeface="D2Coding"/>
+                <a:ea typeface="D2Coding"/>
+                <a:cs typeface="D2Coding"/>
               </a:rPr>
               <a:t>7</a:t>
             </a:r>
@@ -14973,9 +14973,9 @@
                 <a:solidFill>
                   <a:srgbClr val="7A869C"/>
                 </a:solidFill>
-                <a:latin typeface="나눔고딕코딩"/>
-                <a:ea typeface="나눔고딕코딩"/>
-                <a:cs typeface="나눔고딕코딩"/>
+                <a:latin typeface="D2Coding"/>
+                <a:ea typeface="D2Coding"/>
+                <a:cs typeface="D2Coding"/>
               </a:rPr>
               <a:t>8</a:t>
             </a:r>
@@ -14991,9 +14991,9 @@
                 <a:solidFill>
                   <a:srgbClr val="7A869C"/>
                 </a:solidFill>
-                <a:latin typeface="나눔고딕코딩"/>
-                <a:ea typeface="나눔고딕코딩"/>
-                <a:cs typeface="나눔고딕코딩"/>
+                <a:latin typeface="D2Coding"/>
+                <a:ea typeface="D2Coding"/>
+                <a:cs typeface="D2Coding"/>
               </a:rPr>
               <a:t>9</a:t>
             </a:r>
@@ -15009,9 +15009,9 @@
                 <a:solidFill>
                   <a:srgbClr val="7A869C"/>
                 </a:solidFill>
-                <a:latin typeface="나눔고딕코딩"/>
-                <a:ea typeface="나눔고딕코딩"/>
-                <a:cs typeface="나눔고딕코딩"/>
+                <a:latin typeface="D2Coding"/>
+                <a:ea typeface="D2Coding"/>
+                <a:cs typeface="D2Coding"/>
               </a:rPr>
               <a:t>10</a:t>
             </a:r>
@@ -15050,9 +15050,9 @@
                 <a:solidFill>
                   <a:srgbClr val="E6EAF2"/>
                 </a:solidFill>
-                <a:latin typeface="나눔고딕코딩"/>
-                <a:ea typeface="나눔고딕코딩"/>
-                <a:cs typeface="나눔고딕코딩"/>
+                <a:latin typeface="D2Coding"/>
+                <a:ea typeface="D2Coding"/>
+                <a:cs typeface="D2Coding"/>
               </a:rPr>
               <a:t>-- 직원은 8명이지만 salary가 있는 직원은 7명 (E008 조하늘 NULL)</a:t>
             </a:r>
@@ -15068,9 +15068,9 @@
                 <a:solidFill>
                   <a:srgbClr val="E6EAF2"/>
                 </a:solidFill>
-                <a:latin typeface="나눔고딕코딩"/>
-                <a:ea typeface="나눔고딕코딩"/>
-                <a:cs typeface="나눔고딕코딩"/>
+                <a:latin typeface="D2Coding"/>
+                <a:ea typeface="D2Coding"/>
+                <a:cs typeface="D2Coding"/>
               </a:rPr>
               <a:t>SELECT COUNT(*)      AS 전체직원수,   -- 8  (행 수를 센다)</a:t>
             </a:r>
@@ -15086,9 +15086,9 @@
                 <a:solidFill>
                   <a:srgbClr val="E6EAF2"/>
                 </a:solidFill>
-                <a:latin typeface="나눔고딕코딩"/>
-                <a:ea typeface="나눔고딕코딩"/>
-                <a:cs typeface="나눔고딕코딩"/>
+                <a:latin typeface="D2Coding"/>
+                <a:ea typeface="D2Coding"/>
+                <a:cs typeface="D2Coding"/>
               </a:rPr>
               <a:t>       COUNT(salary) AS 연봉등록수,   -- 7  (NULL을 빼고 센다)</a:t>
             </a:r>
@@ -15104,9 +15104,9 @@
                 <a:solidFill>
                   <a:srgbClr val="E6EAF2"/>
                 </a:solidFill>
-                <a:latin typeface="나눔고딕코딩"/>
-                <a:ea typeface="나눔고딕코딩"/>
-                <a:cs typeface="나눔고딕코딩"/>
+                <a:latin typeface="D2Coding"/>
+                <a:ea typeface="D2Coding"/>
+                <a:cs typeface="D2Coding"/>
               </a:rPr>
               <a:t>       AVG(salary)   AS 평균연봉      -- 7명의 평균 (NULL은 분모에서도 제외)</a:t>
             </a:r>
@@ -15122,9 +15122,9 @@
                 <a:solidFill>
                   <a:srgbClr val="E6EAF2"/>
                 </a:solidFill>
-                <a:latin typeface="나눔고딕코딩"/>
-                <a:ea typeface="나눔고딕코딩"/>
-                <a:cs typeface="나눔고딕코딩"/>
+                <a:latin typeface="D2Coding"/>
+                <a:ea typeface="D2Coding"/>
+                <a:cs typeface="D2Coding"/>
               </a:rPr>
               <a:t>FROM   employees;</a:t>
             </a:r>
@@ -15140,9 +15140,9 @@
                 <a:solidFill>
                   <a:srgbClr val="E6EAF2"/>
                 </a:solidFill>
-                <a:latin typeface="나눔고딕코딩"/>
-                <a:ea typeface="나눔고딕코딩"/>
-                <a:cs typeface="나눔고딕코딩"/>
+                <a:latin typeface="D2Coding"/>
+                <a:ea typeface="D2Coding"/>
+                <a:cs typeface="D2Coding"/>
               </a:rPr>
               <a:t/>
             </a:r>
@@ -15158,9 +15158,9 @@
                 <a:solidFill>
                   <a:srgbClr val="E6EAF2"/>
                 </a:solidFill>
-                <a:latin typeface="나눔고딕코딩"/>
-                <a:ea typeface="나눔고딕코딩"/>
-                <a:cs typeface="나눔고딕코딩"/>
+                <a:latin typeface="D2Coding"/>
+                <a:ea typeface="D2Coding"/>
+                <a:cs typeface="D2Coding"/>
               </a:rPr>
               <a:t>-- 함정: "연봉 400 미만 직원" + "연봉 400 이상 직원" ≠ 전체 직원</a:t>
             </a:r>
@@ -15176,9 +15176,9 @@
                 <a:solidFill>
                   <a:srgbClr val="E6EAF2"/>
                 </a:solidFill>
-                <a:latin typeface="나눔고딕코딩"/>
-                <a:ea typeface="나눔고딕코딩"/>
-                <a:cs typeface="나눔고딕코딩"/>
+                <a:latin typeface="D2Coding"/>
+                <a:ea typeface="D2Coding"/>
+                <a:cs typeface="D2Coding"/>
               </a:rPr>
               <a:t>SELECT COUNT(*) FROM employees WHERE salary &lt;  400;  -- 4명</a:t>
             </a:r>
@@ -15194,9 +15194,9 @@
                 <a:solidFill>
                   <a:srgbClr val="E6EAF2"/>
                 </a:solidFill>
-                <a:latin typeface="나눔고딕코딩"/>
-                <a:ea typeface="나눔고딕코딩"/>
-                <a:cs typeface="나눔고딕코딩"/>
+                <a:latin typeface="D2Coding"/>
+                <a:ea typeface="D2Coding"/>
+                <a:cs typeface="D2Coding"/>
               </a:rPr>
               <a:t>SELECT COUNT(*) FROM employees WHERE salary &gt;= 400;  -- 3명</a:t>
             </a:r>
@@ -15212,9 +15212,9 @@
                 <a:solidFill>
                   <a:srgbClr val="E6EAF2"/>
                 </a:solidFill>
-                <a:latin typeface="나눔고딕코딩"/>
-                <a:ea typeface="나눔고딕코딩"/>
-                <a:cs typeface="나눔고딕코딩"/>
+                <a:latin typeface="D2Coding"/>
+                <a:ea typeface="D2Coding"/>
+                <a:cs typeface="D2Coding"/>
               </a:rPr>
               <a:t>-- 4 + 3 = 7명. 조하늘은 어느 쪽 조건도 '참'이 아니라 양쪽 모두에서 빠졌다!</a:t>
             </a:r>
@@ -26938,9 +26938,9 @@
                 <a:solidFill>
                   <a:srgbClr val="7A869C"/>
                 </a:solidFill>
-                <a:latin typeface="나눔고딕코딩"/>
-                <a:ea typeface="나눔고딕코딩"/>
-                <a:cs typeface="나눔고딕코딩"/>
+                <a:latin typeface="D2Coding"/>
+                <a:ea typeface="D2Coding"/>
+                <a:cs typeface="D2Coding"/>
               </a:rPr>
               <a:t>1</a:t>
             </a:r>
@@ -26956,9 +26956,9 @@
                 <a:solidFill>
                   <a:srgbClr val="7A869C"/>
                 </a:solidFill>
-                <a:latin typeface="나눔고딕코딩"/>
-                <a:ea typeface="나눔고딕코딩"/>
-                <a:cs typeface="나눔고딕코딩"/>
+                <a:latin typeface="D2Coding"/>
+                <a:ea typeface="D2Coding"/>
+                <a:cs typeface="D2Coding"/>
               </a:rPr>
               <a:t>2</a:t>
             </a:r>
@@ -26974,9 +26974,9 @@
                 <a:solidFill>
                   <a:srgbClr val="7A869C"/>
                 </a:solidFill>
-                <a:latin typeface="나눔고딕코딩"/>
-                <a:ea typeface="나눔고딕코딩"/>
-                <a:cs typeface="나눔고딕코딩"/>
+                <a:latin typeface="D2Coding"/>
+                <a:ea typeface="D2Coding"/>
+                <a:cs typeface="D2Coding"/>
               </a:rPr>
               <a:t>3</a:t>
             </a:r>
@@ -26992,9 +26992,9 @@
                 <a:solidFill>
                   <a:srgbClr val="7A869C"/>
                 </a:solidFill>
-                <a:latin typeface="나눔고딕코딩"/>
-                <a:ea typeface="나눔고딕코딩"/>
-                <a:cs typeface="나눔고딕코딩"/>
+                <a:latin typeface="D2Coding"/>
+                <a:ea typeface="D2Coding"/>
+                <a:cs typeface="D2Coding"/>
               </a:rPr>
               <a:t>4</a:t>
             </a:r>
@@ -27010,9 +27010,9 @@
                 <a:solidFill>
                   <a:srgbClr val="7A869C"/>
                 </a:solidFill>
-                <a:latin typeface="나눔고딕코딩"/>
-                <a:ea typeface="나눔고딕코딩"/>
-                <a:cs typeface="나눔고딕코딩"/>
+                <a:latin typeface="D2Coding"/>
+                <a:ea typeface="D2Coding"/>
+                <a:cs typeface="D2Coding"/>
               </a:rPr>
               <a:t>5</a:t>
             </a:r>
@@ -27051,9 +27051,9 @@
                 <a:solidFill>
                   <a:srgbClr val="E6EAF2"/>
                 </a:solidFill>
-                <a:latin typeface="나눔고딕코딩"/>
-                <a:ea typeface="나눔고딕코딩"/>
-                <a:cs typeface="나눔고딕코딩"/>
+                <a:latin typeface="D2Coding"/>
+                <a:ea typeface="D2Coding"/>
+                <a:cs typeface="D2Coding"/>
               </a:rPr>
               <a:t>SELECT *</a:t>
             </a:r>
@@ -27069,9 +27069,9 @@
                 <a:solidFill>
                   <a:srgbClr val="E6EAF2"/>
                 </a:solidFill>
-                <a:latin typeface="나눔고딕코딩"/>
-                <a:ea typeface="나눔고딕코딩"/>
-                <a:cs typeface="나눔고딕코딩"/>
+                <a:latin typeface="D2Coding"/>
+                <a:ea typeface="D2Coding"/>
+                <a:cs typeface="D2Coding"/>
               </a:rPr>
               <a:t>FROM   customers</a:t>
             </a:r>
@@ -27087,9 +27087,9 @@
                 <a:solidFill>
                   <a:srgbClr val="E6EAF2"/>
                 </a:solidFill>
-                <a:latin typeface="나눔고딕코딩"/>
-                <a:ea typeface="나눔고딕코딩"/>
-                <a:cs typeface="나눔고딕코딩"/>
+                <a:latin typeface="D2Coding"/>
+                <a:ea typeface="D2Coding"/>
+                <a:cs typeface="D2Coding"/>
               </a:rPr>
               <a:t>WHERE  grade = 'VIP';</a:t>
             </a:r>
@@ -27105,9 +27105,9 @@
                 <a:solidFill>
                   <a:srgbClr val="E6EAF2"/>
                 </a:solidFill>
-                <a:latin typeface="나눔고딕코딩"/>
-                <a:ea typeface="나눔고딕코딩"/>
-                <a:cs typeface="나눔고딕코딩"/>
+                <a:latin typeface="D2Coding"/>
+                <a:ea typeface="D2Coding"/>
+                <a:cs typeface="D2Coding"/>
               </a:rPr>
               <a:t>-- 고객 10명(행 10개) 중 조건에 맞는 한가람·임수빈 2행만 남는다.</a:t>
             </a:r>
@@ -27123,9 +27123,9 @@
                 <a:solidFill>
                   <a:srgbClr val="E6EAF2"/>
                 </a:solidFill>
-                <a:latin typeface="나눔고딕코딩"/>
-                <a:ea typeface="나눔고딕코딩"/>
-                <a:cs typeface="나눔고딕코딩"/>
+                <a:latin typeface="D2Coding"/>
+                <a:ea typeface="D2Coding"/>
+                <a:cs typeface="D2Coding"/>
               </a:rPr>
               <a:t>-- 열은 7개 그대로 → 가로로 자른 것</a:t>
             </a:r>
@@ -27629,9 +27629,9 @@
                 <a:solidFill>
                   <a:srgbClr val="7A869C"/>
                 </a:solidFill>
-                <a:latin typeface="나눔고딕코딩"/>
-                <a:ea typeface="나눔고딕코딩"/>
-                <a:cs typeface="나눔고딕코딩"/>
+                <a:latin typeface="D2Coding"/>
+                <a:ea typeface="D2Coding"/>
+                <a:cs typeface="D2Coding"/>
               </a:rPr>
               <a:t>1</a:t>
             </a:r>
@@ -27647,9 +27647,9 @@
                 <a:solidFill>
                   <a:srgbClr val="7A869C"/>
                 </a:solidFill>
-                <a:latin typeface="나눔고딕코딩"/>
-                <a:ea typeface="나눔고딕코딩"/>
-                <a:cs typeface="나눔고딕코딩"/>
+                <a:latin typeface="D2Coding"/>
+                <a:ea typeface="D2Coding"/>
+                <a:cs typeface="D2Coding"/>
               </a:rPr>
               <a:t>2</a:t>
             </a:r>
@@ -27665,9 +27665,9 @@
                 <a:solidFill>
                   <a:srgbClr val="7A869C"/>
                 </a:solidFill>
-                <a:latin typeface="나눔고딕코딩"/>
-                <a:ea typeface="나눔고딕코딩"/>
-                <a:cs typeface="나눔고딕코딩"/>
+                <a:latin typeface="D2Coding"/>
+                <a:ea typeface="D2Coding"/>
+                <a:cs typeface="D2Coding"/>
               </a:rPr>
               <a:t>3</a:t>
             </a:r>
@@ -27683,9 +27683,9 @@
                 <a:solidFill>
                   <a:srgbClr val="7A869C"/>
                 </a:solidFill>
-                <a:latin typeface="나눔고딕코딩"/>
-                <a:ea typeface="나눔고딕코딩"/>
-                <a:cs typeface="나눔고딕코딩"/>
+                <a:latin typeface="D2Coding"/>
+                <a:ea typeface="D2Coding"/>
+                <a:cs typeface="D2Coding"/>
               </a:rPr>
               <a:t>4</a:t>
             </a:r>
@@ -27701,9 +27701,9 @@
                 <a:solidFill>
                   <a:srgbClr val="7A869C"/>
                 </a:solidFill>
-                <a:latin typeface="나눔고딕코딩"/>
-                <a:ea typeface="나눔고딕코딩"/>
-                <a:cs typeface="나눔고딕코딩"/>
+                <a:latin typeface="D2Coding"/>
+                <a:ea typeface="D2Coding"/>
+                <a:cs typeface="D2Coding"/>
               </a:rPr>
               <a:t>5</a:t>
             </a:r>
@@ -27719,9 +27719,9 @@
                 <a:solidFill>
                   <a:srgbClr val="7A869C"/>
                 </a:solidFill>
-                <a:latin typeface="나눔고딕코딩"/>
-                <a:ea typeface="나눔고딕코딩"/>
-                <a:cs typeface="나눔고딕코딩"/>
+                <a:latin typeface="D2Coding"/>
+                <a:ea typeface="D2Coding"/>
+                <a:cs typeface="D2Coding"/>
               </a:rPr>
               <a:t>6</a:t>
             </a:r>
@@ -27737,9 +27737,9 @@
                 <a:solidFill>
                   <a:srgbClr val="7A869C"/>
                 </a:solidFill>
-                <a:latin typeface="나눔고딕코딩"/>
-                <a:ea typeface="나눔고딕코딩"/>
-                <a:cs typeface="나눔고딕코딩"/>
+                <a:latin typeface="D2Coding"/>
+                <a:ea typeface="D2Coding"/>
+                <a:cs typeface="D2Coding"/>
               </a:rPr>
               <a:t>7</a:t>
             </a:r>
@@ -27755,9 +27755,9 @@
                 <a:solidFill>
                   <a:srgbClr val="7A869C"/>
                 </a:solidFill>
-                <a:latin typeface="나눔고딕코딩"/>
-                <a:ea typeface="나눔고딕코딩"/>
-                <a:cs typeface="나눔고딕코딩"/>
+                <a:latin typeface="D2Coding"/>
+                <a:ea typeface="D2Coding"/>
+                <a:cs typeface="D2Coding"/>
               </a:rPr>
               <a:t>8</a:t>
             </a:r>
@@ -27773,9 +27773,9 @@
                 <a:solidFill>
                   <a:srgbClr val="7A869C"/>
                 </a:solidFill>
-                <a:latin typeface="나눔고딕코딩"/>
-                <a:ea typeface="나눔고딕코딩"/>
-                <a:cs typeface="나눔고딕코딩"/>
+                <a:latin typeface="D2Coding"/>
+                <a:ea typeface="D2Coding"/>
+                <a:cs typeface="D2Coding"/>
               </a:rPr>
               <a:t>9</a:t>
             </a:r>
@@ -27814,9 +27814,9 @@
                 <a:solidFill>
                   <a:srgbClr val="E6EAF2"/>
                 </a:solidFill>
-                <a:latin typeface="나눔고딕코딩"/>
-                <a:ea typeface="나눔고딕코딩"/>
-                <a:cs typeface="나눔고딕코딩"/>
+                <a:latin typeface="D2Coding"/>
+                <a:ea typeface="D2Coding"/>
+                <a:cs typeface="D2Coding"/>
               </a:rPr>
               <a:t>SELECT name, grade</a:t>
             </a:r>
@@ -27832,9 +27832,9 @@
                 <a:solidFill>
                   <a:srgbClr val="E6EAF2"/>
                 </a:solidFill>
-                <a:latin typeface="나눔고딕코딩"/>
-                <a:ea typeface="나눔고딕코딩"/>
-                <a:cs typeface="나눔고딕코딩"/>
+                <a:latin typeface="D2Coding"/>
+                <a:ea typeface="D2Coding"/>
+                <a:cs typeface="D2Coding"/>
               </a:rPr>
               <a:t>FROM   customers;</a:t>
             </a:r>
@@ -27850,9 +27850,9 @@
                 <a:solidFill>
                   <a:srgbClr val="E6EAF2"/>
                 </a:solidFill>
-                <a:latin typeface="나눔고딕코딩"/>
-                <a:ea typeface="나눔고딕코딩"/>
-                <a:cs typeface="나눔고딕코딩"/>
+                <a:latin typeface="D2Coding"/>
+                <a:ea typeface="D2Coding"/>
+                <a:cs typeface="D2Coding"/>
               </a:rPr>
               <a:t>-- 열 7개 중 name·grade 2개만 남는다.</a:t>
             </a:r>
@@ -27868,9 +27868,9 @@
                 <a:solidFill>
                   <a:srgbClr val="E6EAF2"/>
                 </a:solidFill>
-                <a:latin typeface="나눔고딕코딩"/>
-                <a:ea typeface="나눔고딕코딩"/>
-                <a:cs typeface="나눔고딕코딩"/>
+                <a:latin typeface="D2Coding"/>
+                <a:ea typeface="D2Coding"/>
+                <a:cs typeface="D2Coding"/>
               </a:rPr>
               <a:t>-- 행은 10개 그대로 → 세로로 자른 것</a:t>
             </a:r>
@@ -27886,9 +27886,9 @@
                 <a:solidFill>
                   <a:srgbClr val="E6EAF2"/>
                 </a:solidFill>
-                <a:latin typeface="나눔고딕코딩"/>
-                <a:ea typeface="나눔고딕코딩"/>
-                <a:cs typeface="나눔고딕코딩"/>
+                <a:latin typeface="D2Coding"/>
+                <a:ea typeface="D2Coding"/>
+                <a:cs typeface="D2Coding"/>
               </a:rPr>
               <a:t/>
             </a:r>
@@ -27904,9 +27904,9 @@
                 <a:solidFill>
                   <a:srgbClr val="E6EAF2"/>
                 </a:solidFill>
-                <a:latin typeface="나눔고딕코딩"/>
-                <a:ea typeface="나눔고딕코딩"/>
-                <a:cs typeface="나눔고딕코딩"/>
+                <a:latin typeface="D2Coding"/>
+                <a:ea typeface="D2Coding"/>
+                <a:cs typeface="D2Coding"/>
               </a:rPr>
               <a:t>-- 실무 쿼리는 대부분 선택 + 투영의 조합이다</a:t>
             </a:r>
@@ -27922,9 +27922,9 @@
                 <a:solidFill>
                   <a:srgbClr val="E6EAF2"/>
                 </a:solidFill>
-                <a:latin typeface="나눔고딕코딩"/>
-                <a:ea typeface="나눔고딕코딩"/>
-                <a:cs typeface="나눔고딕코딩"/>
+                <a:latin typeface="D2Coding"/>
+                <a:ea typeface="D2Coding"/>
+                <a:cs typeface="D2Coding"/>
               </a:rPr>
               <a:t>SELECT name, points          -- 투영: 열 2개만</a:t>
             </a:r>
@@ -27940,9 +27940,9 @@
                 <a:solidFill>
                   <a:srgbClr val="E6EAF2"/>
                 </a:solidFill>
-                <a:latin typeface="나눔고딕코딩"/>
-                <a:ea typeface="나눔고딕코딩"/>
-                <a:cs typeface="나눔고딕코딩"/>
+                <a:latin typeface="D2Coding"/>
+                <a:ea typeface="D2Coding"/>
+                <a:cs typeface="D2Coding"/>
               </a:rPr>
               <a:t>FROM   customers</a:t>
             </a:r>
@@ -27958,9 +27958,9 @@
                 <a:solidFill>
                   <a:srgbClr val="E6EAF2"/>
                 </a:solidFill>
-                <a:latin typeface="나눔고딕코딩"/>
-                <a:ea typeface="나눔고딕코딩"/>
-                <a:cs typeface="나눔고딕코딩"/>
+                <a:latin typeface="D2Coding"/>
+                <a:ea typeface="D2Coding"/>
+                <a:cs typeface="D2Coding"/>
               </a:rPr>
               <a:t>WHERE  grade = 'VIP';        -- 선택: VIP 행만</a:t>
             </a:r>
@@ -28464,9 +28464,9 @@
                 <a:solidFill>
                   <a:srgbClr val="7A869C"/>
                 </a:solidFill>
-                <a:latin typeface="나눔고딕코딩"/>
-                <a:ea typeface="나눔고딕코딩"/>
-                <a:cs typeface="나눔고딕코딩"/>
+                <a:latin typeface="D2Coding"/>
+                <a:ea typeface="D2Coding"/>
+                <a:cs typeface="D2Coding"/>
               </a:rPr>
               <a:t>1</a:t>
             </a:r>
@@ -28482,9 +28482,9 @@
                 <a:solidFill>
                   <a:srgbClr val="7A869C"/>
                 </a:solidFill>
-                <a:latin typeface="나눔고딕코딩"/>
-                <a:ea typeface="나눔고딕코딩"/>
-                <a:cs typeface="나눔고딕코딩"/>
+                <a:latin typeface="D2Coding"/>
+                <a:ea typeface="D2Coding"/>
+                <a:cs typeface="D2Coding"/>
               </a:rPr>
               <a:t>2</a:t>
             </a:r>
@@ -28500,9 +28500,9 @@
                 <a:solidFill>
                   <a:srgbClr val="7A869C"/>
                 </a:solidFill>
-                <a:latin typeface="나눔고딕코딩"/>
-                <a:ea typeface="나눔고딕코딩"/>
-                <a:cs typeface="나눔고딕코딩"/>
+                <a:latin typeface="D2Coding"/>
+                <a:ea typeface="D2Coding"/>
+                <a:cs typeface="D2Coding"/>
               </a:rPr>
               <a:t>3</a:t>
             </a:r>
@@ -28518,9 +28518,9 @@
                 <a:solidFill>
                   <a:srgbClr val="7A869C"/>
                 </a:solidFill>
-                <a:latin typeface="나눔고딕코딩"/>
-                <a:ea typeface="나눔고딕코딩"/>
-                <a:cs typeface="나눔고딕코딩"/>
+                <a:latin typeface="D2Coding"/>
+                <a:ea typeface="D2Coding"/>
+                <a:cs typeface="D2Coding"/>
               </a:rPr>
               <a:t>4</a:t>
             </a:r>
@@ -28536,9 +28536,9 @@
                 <a:solidFill>
                   <a:srgbClr val="7A869C"/>
                 </a:solidFill>
-                <a:latin typeface="나눔고딕코딩"/>
-                <a:ea typeface="나눔고딕코딩"/>
-                <a:cs typeface="나눔고딕코딩"/>
+                <a:latin typeface="D2Coding"/>
+                <a:ea typeface="D2Coding"/>
+                <a:cs typeface="D2Coding"/>
               </a:rPr>
               <a:t>5</a:t>
             </a:r>
@@ -28577,9 +28577,9 @@
                 <a:solidFill>
                   <a:srgbClr val="E6EAF2"/>
                 </a:solidFill>
-                <a:latin typeface="나눔고딕코딩"/>
-                <a:ea typeface="나눔고딕코딩"/>
-                <a:cs typeface="나눔고딕코딩"/>
+                <a:latin typeface="D2Coding"/>
+                <a:ea typeface="D2Coding"/>
+                <a:cs typeface="D2Coding"/>
               </a:rPr>
               <a:t>SELECT o.order_id, c.name, o.order_date</a:t>
             </a:r>
@@ -28595,9 +28595,9 @@
                 <a:solidFill>
                   <a:srgbClr val="E6EAF2"/>
                 </a:solidFill>
-                <a:latin typeface="나눔고딕코딩"/>
-                <a:ea typeface="나눔고딕코딩"/>
-                <a:cs typeface="나눔고딕코딩"/>
+                <a:latin typeface="D2Coding"/>
+                <a:ea typeface="D2Coding"/>
+                <a:cs typeface="D2Coding"/>
               </a:rPr>
               <a:t>FROM   orders o</a:t>
             </a:r>
@@ -28613,9 +28613,9 @@
                 <a:solidFill>
                   <a:srgbClr val="E6EAF2"/>
                 </a:solidFill>
-                <a:latin typeface="나눔고딕코딩"/>
-                <a:ea typeface="나눔고딕코딩"/>
-                <a:cs typeface="나눔고딕코딩"/>
+                <a:latin typeface="D2Coding"/>
+                <a:ea typeface="D2Coding"/>
+                <a:cs typeface="D2Coding"/>
               </a:rPr>
               <a:t>JOIN   customers c ON o.cust_id = c.cust_id;</a:t>
             </a:r>
@@ -28631,9 +28631,9 @@
                 <a:solidFill>
                   <a:srgbClr val="E6EAF2"/>
                 </a:solidFill>
-                <a:latin typeface="나눔고딕코딩"/>
-                <a:ea typeface="나눔고딕코딩"/>
-                <a:cs typeface="나눔고딕코딩"/>
+                <a:latin typeface="D2Coding"/>
+                <a:ea typeface="D2Coding"/>
+                <a:cs typeface="D2Coding"/>
               </a:rPr>
               <a:t>-- 주문 1001(C001) 행에 고객 한가람 행이 이어 붙어</a:t>
             </a:r>
@@ -28649,9 +28649,9 @@
                 <a:solidFill>
                   <a:srgbClr val="E6EAF2"/>
                 </a:solidFill>
-                <a:latin typeface="나눔고딕코딩"/>
-                <a:ea typeface="나눔고딕코딩"/>
-                <a:cs typeface="나눔고딕코딩"/>
+                <a:latin typeface="D2Coding"/>
+                <a:ea typeface="D2Coding"/>
+                <a:cs typeface="D2Coding"/>
               </a:rPr>
               <a:t>-- "1001 | 한가람 | 2026-01-10" 처럼 읽히는 결과가 된다.</a:t>
             </a:r>
